--- a/Aulas/Atualizado/Aula - MVC.pptx
+++ b/Aulas/Atualizado/Aula - MVC.pptx
@@ -136,7 +136,7 @@
       </p15:sldGuideLst>
     </p:ext>
     <p:ext uri="GoogleSlidesCustomDataVersion2">
-      <go:slidesCustomData xmlns="" xmlns:mc="http://schemas.openxmlformats.org/markup-compatibility/2006" xmlns:mv="urn:schemas-microsoft-com:mac:vml" xmlns:c="http://schemas.openxmlformats.org/drawingml/2006/chart" xmlns:dgm="http://schemas.openxmlformats.org/drawingml/2006/diagram" xmlns:o="urn:schemas-microsoft-com:office:office" xmlns:v="urn:schemas-microsoft-com:vml" xmlns:pvml="urn:schemas-microsoft-com:office:powerpoint" xmlns:com="http://schemas.openxmlformats.org/drawingml/2006/compatibility" xmlns:p14="http://schemas.microsoft.com/office/powerpoint/2010/main" xmlns:p15="http://schemas.microsoft.com/office/powerpoint/2012/main" xmlns:ahyp="http://schemas.microsoft.com/office/drawing/2018/hyperlinkcolor" xmlns:go="http://customooxmlschemas.google.com/" r:id="rId27" roundtripDataSignature="AMtx7mg9iRh1gpXmS9NDlWO/q0dmAy0Q9w=="/>
+      <go:slidesCustomData xmlns:go="http://customooxmlschemas.google.com/" xmlns:ahyp="http://schemas.microsoft.com/office/drawing/2018/hyperlinkcolor" xmlns:p15="http://schemas.microsoft.com/office/powerpoint/2012/main" xmlns:p14="http://schemas.microsoft.com/office/powerpoint/2010/main" xmlns:com="http://schemas.openxmlformats.org/drawingml/2006/compatibility" xmlns:pvml="urn:schemas-microsoft-com:office:powerpoint" xmlns:v="urn:schemas-microsoft-com:vml" xmlns:o="urn:schemas-microsoft-com:office:office" xmlns:dgm="http://schemas.openxmlformats.org/drawingml/2006/diagram" xmlns:c="http://schemas.openxmlformats.org/drawingml/2006/chart" xmlns:mv="urn:schemas-microsoft-com:mac:vml" xmlns:mc="http://schemas.openxmlformats.org/markup-compatibility/2006" xmlns="" r:id="rId27" roundtripDataSignature="AMtx7mg9iRh1gpXmS9NDlWO/q0dmAy0Q9w=="/>
     </p:ext>
   </p:extLst>
 </p:presentation>
@@ -144,6 +144,15 @@
 
 <file path=ppt/changesInfos/changesInfo1.xml><?xml version="1.0" encoding="utf-8"?>
 <pc:chgInfo xmlns:a="http://schemas.openxmlformats.org/drawingml/2006/main" xmlns:r="http://schemas.openxmlformats.org/officeDocument/2006/relationships" xmlns:ac="http://schemas.microsoft.com/office/drawing/2013/main/command" xmlns:pc="http://schemas.microsoft.com/office/powerpoint/2013/main/command">
+  <pc:docChgLst>
+    <pc:chgData name="Nathália Nogueira" userId="72fb52ae66b9bc35" providerId="LiveId" clId="{CED1D195-F075-43DC-9ED7-11F33968DBDF}"/>
+    <pc:docChg chg="modShowInfo">
+      <pc:chgData name="Nathália Nogueira" userId="72fb52ae66b9bc35" providerId="LiveId" clId="{CED1D195-F075-43DC-9ED7-11F33968DBDF}" dt="2025-05-30T21:29:12.882" v="1" actId="2744"/>
+      <pc:docMkLst>
+        <pc:docMk/>
+      </pc:docMkLst>
+    </pc:docChg>
+  </pc:docChgLst>
   <pc:docChgLst>
     <pc:chgData name="Caio Eduardo Ireno" userId="1862f81e13df3e98" providerId="LiveId" clId="{780BDCD0-A6C5-4CF0-A10A-8562CC058092}"/>
     <pc:docChg chg="undo custSel addSld delSld modSld">
@@ -157,38 +166,6 @@
           <pc:docMk/>
           <pc:sldMk cId="0" sldId="257"/>
         </pc:sldMkLst>
-        <pc:spChg chg="add del">
-          <ac:chgData name="Caio Eduardo Ireno" userId="1862f81e13df3e98" providerId="LiveId" clId="{780BDCD0-A6C5-4CF0-A10A-8562CC058092}" dt="2024-08-17T12:29:17.079" v="31" actId="478"/>
-          <ac:spMkLst>
-            <pc:docMk/>
-            <pc:sldMk cId="0" sldId="257"/>
-            <ac:spMk id="8" creationId="{2DF41F51-2527-D8E1-CEB6-1CB7BA35FE30}"/>
-          </ac:spMkLst>
-        </pc:spChg>
-        <pc:spChg chg="mod">
-          <ac:chgData name="Caio Eduardo Ireno" userId="1862f81e13df3e98" providerId="LiveId" clId="{780BDCD0-A6C5-4CF0-A10A-8562CC058092}" dt="2024-08-17T12:29:16.516" v="29" actId="6549"/>
-          <ac:spMkLst>
-            <pc:docMk/>
-            <pc:sldMk cId="0" sldId="257"/>
-            <ac:spMk id="9" creationId="{9109E2AC-B0AE-39CA-9FF7-CFCE96C48CAC}"/>
-          </ac:spMkLst>
-        </pc:spChg>
-        <pc:spChg chg="add del">
-          <ac:chgData name="Caio Eduardo Ireno" userId="1862f81e13df3e98" providerId="LiveId" clId="{780BDCD0-A6C5-4CF0-A10A-8562CC058092}" dt="2024-08-17T12:29:16.807" v="30" actId="478"/>
-          <ac:spMkLst>
-            <pc:docMk/>
-            <pc:sldMk cId="0" sldId="257"/>
-            <ac:spMk id="13" creationId="{336C4D05-DB2B-ED76-A26C-89E61264ACDC}"/>
-          </ac:spMkLst>
-        </pc:spChg>
-        <pc:spChg chg="mod">
-          <ac:chgData name="Caio Eduardo Ireno" userId="1862f81e13df3e98" providerId="LiveId" clId="{780BDCD0-A6C5-4CF0-A10A-8562CC058092}" dt="2024-08-17T12:29:15.525" v="27" actId="6549"/>
-          <ac:spMkLst>
-            <pc:docMk/>
-            <pc:sldMk cId="0" sldId="257"/>
-            <ac:spMk id="92" creationId="{00000000-0000-0000-0000-000000000000}"/>
-          </ac:spMkLst>
-        </pc:spChg>
       </pc:sldChg>
       <pc:sldChg chg="add del">
         <pc:chgData name="Caio Eduardo Ireno" userId="1862f81e13df3e98" providerId="LiveId" clId="{780BDCD0-A6C5-4CF0-A10A-8562CC058092}" dt="2024-08-17T12:29:14.205" v="23" actId="47"/>
@@ -261,22 +238,6 @@
           <pc:docMk/>
           <pc:sldMk cId="0" sldId="256"/>
         </pc:sldMkLst>
-        <pc:spChg chg="mod">
-          <ac:chgData name="Caio Eduardo Ireno" userId="1862f81e13df3e98" providerId="LiveId" clId="{32C3D5D9-CEE4-47B4-98AC-81279FDF8C9F}" dt="2024-04-09T22:04:35.314" v="15" actId="20577"/>
-          <ac:spMkLst>
-            <pc:docMk/>
-            <pc:sldMk cId="0" sldId="256"/>
-            <ac:spMk id="84" creationId="{00000000-0000-0000-0000-000000000000}"/>
-          </ac:spMkLst>
-        </pc:spChg>
-        <pc:spChg chg="mod">
-          <ac:chgData name="Caio Eduardo Ireno" userId="1862f81e13df3e98" providerId="LiveId" clId="{32C3D5D9-CEE4-47B4-98AC-81279FDF8C9F}" dt="2024-04-09T22:05:08.804" v="25" actId="1076"/>
-          <ac:spMkLst>
-            <pc:docMk/>
-            <pc:sldMk cId="0" sldId="256"/>
-            <ac:spMk id="85" creationId="{00000000-0000-0000-0000-000000000000}"/>
-          </ac:spMkLst>
-        </pc:spChg>
       </pc:sldChg>
       <pc:sldChg chg="addSp delSp modSp mod">
         <pc:chgData name="Caio Eduardo Ireno" userId="1862f81e13df3e98" providerId="LiveId" clId="{32C3D5D9-CEE4-47B4-98AC-81279FDF8C9F}" dt="2024-04-09T22:10:00.377" v="112" actId="14100"/>
@@ -284,78 +245,6 @@
           <pc:docMk/>
           <pc:sldMk cId="0" sldId="257"/>
         </pc:sldMkLst>
-        <pc:spChg chg="add del mod">
-          <ac:chgData name="Caio Eduardo Ireno" userId="1862f81e13df3e98" providerId="LiveId" clId="{32C3D5D9-CEE4-47B4-98AC-81279FDF8C9F}" dt="2024-04-09T22:07:49.200" v="74" actId="478"/>
-          <ac:spMkLst>
-            <pc:docMk/>
-            <pc:sldMk cId="0" sldId="257"/>
-            <ac:spMk id="3" creationId="{101C6E9A-D3E0-E447-401E-1A632CF25012}"/>
-          </ac:spMkLst>
-        </pc:spChg>
-        <pc:spChg chg="del">
-          <ac:chgData name="Caio Eduardo Ireno" userId="1862f81e13df3e98" providerId="LiveId" clId="{32C3D5D9-CEE4-47B4-98AC-81279FDF8C9F}" dt="2024-04-09T22:07:50.742" v="75" actId="478"/>
-          <ac:spMkLst>
-            <pc:docMk/>
-            <pc:sldMk cId="0" sldId="257"/>
-            <ac:spMk id="5" creationId="{02D286B8-3DA3-24E7-F76D-798632F9E197}"/>
-          </ac:spMkLst>
-        </pc:spChg>
-        <pc:spChg chg="add del">
-          <ac:chgData name="Caio Eduardo Ireno" userId="1862f81e13df3e98" providerId="LiveId" clId="{32C3D5D9-CEE4-47B4-98AC-81279FDF8C9F}" dt="2024-04-09T22:08:47.589" v="86" actId="22"/>
-          <ac:spMkLst>
-            <pc:docMk/>
-            <pc:sldMk cId="0" sldId="257"/>
-            <ac:spMk id="6" creationId="{A8AFC4E5-2685-B3D1-B2E9-3BFE04648728}"/>
-          </ac:spMkLst>
-        </pc:spChg>
-        <pc:spChg chg="add mod">
-          <ac:chgData name="Caio Eduardo Ireno" userId="1862f81e13df3e98" providerId="LiveId" clId="{32C3D5D9-CEE4-47B4-98AC-81279FDF8C9F}" dt="2024-04-09T22:09:57.781" v="111" actId="14100"/>
-          <ac:spMkLst>
-            <pc:docMk/>
-            <pc:sldMk cId="0" sldId="257"/>
-            <ac:spMk id="8" creationId="{2DF41F51-2527-D8E1-CEB6-1CB7BA35FE30}"/>
-          </ac:spMkLst>
-        </pc:spChg>
-        <pc:spChg chg="mod">
-          <ac:chgData name="Caio Eduardo Ireno" userId="1862f81e13df3e98" providerId="LiveId" clId="{32C3D5D9-CEE4-47B4-98AC-81279FDF8C9F}" dt="2024-04-09T22:09:50.607" v="109" actId="123"/>
-          <ac:spMkLst>
-            <pc:docMk/>
-            <pc:sldMk cId="0" sldId="257"/>
-            <ac:spMk id="9" creationId="{9109E2AC-B0AE-39CA-9FF7-CFCE96C48CAC}"/>
-          </ac:spMkLst>
-        </pc:spChg>
-        <pc:spChg chg="add del">
-          <ac:chgData name="Caio Eduardo Ireno" userId="1862f81e13df3e98" providerId="LiveId" clId="{32C3D5D9-CEE4-47B4-98AC-81279FDF8C9F}" dt="2024-04-09T22:09:16.826" v="96" actId="22"/>
-          <ac:spMkLst>
-            <pc:docMk/>
-            <pc:sldMk cId="0" sldId="257"/>
-            <ac:spMk id="11" creationId="{E0297E69-AC35-E47C-D69E-A82C7A2055CF}"/>
-          </ac:spMkLst>
-        </pc:spChg>
-        <pc:spChg chg="add mod">
-          <ac:chgData name="Caio Eduardo Ireno" userId="1862f81e13df3e98" providerId="LiveId" clId="{32C3D5D9-CEE4-47B4-98AC-81279FDF8C9F}" dt="2024-04-09T22:10:00.377" v="112" actId="14100"/>
-          <ac:spMkLst>
-            <pc:docMk/>
-            <pc:sldMk cId="0" sldId="257"/>
-            <ac:spMk id="13" creationId="{336C4D05-DB2B-ED76-A26C-89E61264ACDC}"/>
-          </ac:spMkLst>
-        </pc:spChg>
-        <pc:spChg chg="mod">
-          <ac:chgData name="Caio Eduardo Ireno" userId="1862f81e13df3e98" providerId="LiveId" clId="{32C3D5D9-CEE4-47B4-98AC-81279FDF8C9F}" dt="2024-04-09T22:08:27.597" v="84" actId="1076"/>
-          <ac:spMkLst>
-            <pc:docMk/>
-            <pc:sldMk cId="0" sldId="257"/>
-            <ac:spMk id="92" creationId="{00000000-0000-0000-0000-000000000000}"/>
-          </ac:spMkLst>
-        </pc:spChg>
-        <pc:spChg chg="del">
-          <ac:chgData name="Caio Eduardo Ireno" userId="1862f81e13df3e98" providerId="LiveId" clId="{32C3D5D9-CEE4-47B4-98AC-81279FDF8C9F}" dt="2024-04-09T22:07:46.781" v="73" actId="478"/>
-          <ac:spMkLst>
-            <pc:docMk/>
-            <pc:sldMk cId="0" sldId="257"/>
-            <ac:spMk id="93" creationId="{00000000-0000-0000-0000-000000000000}"/>
-          </ac:spMkLst>
-        </pc:spChg>
       </pc:sldChg>
       <pc:sldChg chg="addSp delSp modSp new mod">
         <pc:chgData name="Caio Eduardo Ireno" userId="1862f81e13df3e98" providerId="LiveId" clId="{32C3D5D9-CEE4-47B4-98AC-81279FDF8C9F}" dt="2024-04-09T23:16:57.646" v="185"/>
@@ -363,46 +252,6 @@
           <pc:docMk/>
           <pc:sldMk cId="1089838417" sldId="276"/>
         </pc:sldMkLst>
-        <pc:spChg chg="del">
-          <ac:chgData name="Caio Eduardo Ireno" userId="1862f81e13df3e98" providerId="LiveId" clId="{32C3D5D9-CEE4-47B4-98AC-81279FDF8C9F}" dt="2024-04-09T23:16:56.533" v="184" actId="478"/>
-          <ac:spMkLst>
-            <pc:docMk/>
-            <pc:sldMk cId="1089838417" sldId="276"/>
-            <ac:spMk id="2" creationId="{899C88FA-C5D1-01D0-D9C5-7B5FE6EDDEF9}"/>
-          </ac:spMkLst>
-        </pc:spChg>
-        <pc:spChg chg="mod">
-          <ac:chgData name="Caio Eduardo Ireno" userId="1862f81e13df3e98" providerId="LiveId" clId="{32C3D5D9-CEE4-47B4-98AC-81279FDF8C9F}" dt="2024-04-09T23:12:21.423" v="134" actId="1076"/>
-          <ac:spMkLst>
-            <pc:docMk/>
-            <pc:sldMk cId="1089838417" sldId="276"/>
-            <ac:spMk id="3" creationId="{D3A5D81F-CE27-991D-8FDE-00D15D0C652A}"/>
-          </ac:spMkLst>
-        </pc:spChg>
-        <pc:spChg chg="add del">
-          <ac:chgData name="Caio Eduardo Ireno" userId="1862f81e13df3e98" providerId="LiveId" clId="{32C3D5D9-CEE4-47B4-98AC-81279FDF8C9F}" dt="2024-04-09T23:11:54.527" v="123" actId="22"/>
-          <ac:spMkLst>
-            <pc:docMk/>
-            <pc:sldMk cId="1089838417" sldId="276"/>
-            <ac:spMk id="6" creationId="{435C9093-583D-1C9B-AE45-36276AF427BD}"/>
-          </ac:spMkLst>
-        </pc:spChg>
-        <pc:spChg chg="add mod">
-          <ac:chgData name="Caio Eduardo Ireno" userId="1862f81e13df3e98" providerId="LiveId" clId="{32C3D5D9-CEE4-47B4-98AC-81279FDF8C9F}" dt="2024-04-09T23:12:38.384" v="136" actId="207"/>
-          <ac:spMkLst>
-            <pc:docMk/>
-            <pc:sldMk cId="1089838417" sldId="276"/>
-            <ac:spMk id="8" creationId="{B35A2C7B-C01D-0465-F971-A01D72DA24B3}"/>
-          </ac:spMkLst>
-        </pc:spChg>
-        <pc:spChg chg="add mod">
-          <ac:chgData name="Caio Eduardo Ireno" userId="1862f81e13df3e98" providerId="LiveId" clId="{32C3D5D9-CEE4-47B4-98AC-81279FDF8C9F}" dt="2024-04-09T23:16:57.646" v="185"/>
-          <ac:spMkLst>
-            <pc:docMk/>
-            <pc:sldMk cId="1089838417" sldId="276"/>
-            <ac:spMk id="9" creationId="{FA821A4B-AC07-CC02-748C-EA9DEFC8E2AA}"/>
-          </ac:spMkLst>
-        </pc:spChg>
       </pc:sldChg>
       <pc:sldChg chg="del">
         <pc:chgData name="Caio Eduardo Ireno" userId="1862f81e13df3e98" providerId="LiveId" clId="{32C3D5D9-CEE4-47B4-98AC-81279FDF8C9F}" dt="2024-04-09T22:05:19.790" v="33" actId="47"/>
@@ -417,38 +266,6 @@
           <pc:docMk/>
           <pc:sldMk cId="1308850580" sldId="277"/>
         </pc:sldMkLst>
-        <pc:spChg chg="del mod">
-          <ac:chgData name="Caio Eduardo Ireno" userId="1862f81e13df3e98" providerId="LiveId" clId="{32C3D5D9-CEE4-47B4-98AC-81279FDF8C9F}" dt="2024-04-09T23:17:01.412" v="186" actId="478"/>
-          <ac:spMkLst>
-            <pc:docMk/>
-            <pc:sldMk cId="1308850580" sldId="277"/>
-            <ac:spMk id="2" creationId="{A451BF45-1E69-23B9-2574-E894367A5068}"/>
-          </ac:spMkLst>
-        </pc:spChg>
-        <pc:spChg chg="mod">
-          <ac:chgData name="Caio Eduardo Ireno" userId="1862f81e13df3e98" providerId="LiveId" clId="{32C3D5D9-CEE4-47B4-98AC-81279FDF8C9F}" dt="2024-04-09T23:16:31.870" v="183" actId="14100"/>
-          <ac:spMkLst>
-            <pc:docMk/>
-            <pc:sldMk cId="1308850580" sldId="277"/>
-            <ac:spMk id="3" creationId="{559ADD3A-3661-B84D-296E-BAA6FFB819E5}"/>
-          </ac:spMkLst>
-        </pc:spChg>
-        <pc:spChg chg="add mod">
-          <ac:chgData name="Caio Eduardo Ireno" userId="1862f81e13df3e98" providerId="LiveId" clId="{32C3D5D9-CEE4-47B4-98AC-81279FDF8C9F}" dt="2024-04-09T23:25:53.427" v="207" actId="20577"/>
-          <ac:spMkLst>
-            <pc:docMk/>
-            <pc:sldMk cId="1308850580" sldId="277"/>
-            <ac:spMk id="6" creationId="{5F2FB56F-ACFA-727F-3F0B-F47199C9FFD4}"/>
-          </ac:spMkLst>
-        </pc:spChg>
-        <pc:spChg chg="add mod">
-          <ac:chgData name="Caio Eduardo Ireno" userId="1862f81e13df3e98" providerId="LiveId" clId="{32C3D5D9-CEE4-47B4-98AC-81279FDF8C9F}" dt="2024-04-09T23:17:02.746" v="187"/>
-          <ac:spMkLst>
-            <pc:docMk/>
-            <pc:sldMk cId="1308850580" sldId="277"/>
-            <ac:spMk id="7" creationId="{528EBC4A-1E7C-2E79-9413-C6BA764C1AD6}"/>
-          </ac:spMkLst>
-        </pc:spChg>
       </pc:sldChg>
       <pc:sldChg chg="del">
         <pc:chgData name="Caio Eduardo Ireno" userId="1862f81e13df3e98" providerId="LiveId" clId="{32C3D5D9-CEE4-47B4-98AC-81279FDF8C9F}" dt="2024-04-09T22:05:19.290" v="32" actId="47"/>
@@ -463,22 +280,6 @@
           <pc:docMk/>
           <pc:sldMk cId="1674899304" sldId="278"/>
         </pc:sldMkLst>
-        <pc:spChg chg="mod">
-          <ac:chgData name="Caio Eduardo Ireno" userId="1862f81e13df3e98" providerId="LiveId" clId="{32C3D5D9-CEE4-47B4-98AC-81279FDF8C9F}" dt="2024-04-09T23:26:15.384" v="210" actId="1076"/>
-          <ac:spMkLst>
-            <pc:docMk/>
-            <pc:sldMk cId="1674899304" sldId="278"/>
-            <ac:spMk id="2" creationId="{21BBE15D-33AD-E024-AF7E-6D9A9BA4D9AD}"/>
-          </ac:spMkLst>
-        </pc:spChg>
-        <pc:spChg chg="mod">
-          <ac:chgData name="Caio Eduardo Ireno" userId="1862f81e13df3e98" providerId="LiveId" clId="{32C3D5D9-CEE4-47B4-98AC-81279FDF8C9F}" dt="2024-04-09T23:26:00.563" v="208" actId="108"/>
-          <ac:spMkLst>
-            <pc:docMk/>
-            <pc:sldMk cId="1674899304" sldId="278"/>
-            <ac:spMk id="3" creationId="{033AEDF5-B92B-5DDB-C56F-F7B8C5D554A0}"/>
-          </ac:spMkLst>
-        </pc:spChg>
       </pc:sldChg>
       <pc:sldChg chg="del">
         <pc:chgData name="Caio Eduardo Ireno" userId="1862f81e13df3e98" providerId="LiveId" clId="{32C3D5D9-CEE4-47B4-98AC-81279FDF8C9F}" dt="2024-04-09T22:05:16.191" v="26" actId="47"/>
@@ -493,30 +294,6 @@
           <pc:docMk/>
           <pc:sldMk cId="1361684937" sldId="279"/>
         </pc:sldMkLst>
-        <pc:spChg chg="del">
-          <ac:chgData name="Caio Eduardo Ireno" userId="1862f81e13df3e98" providerId="LiveId" clId="{32C3D5D9-CEE4-47B4-98AC-81279FDF8C9F}" dt="2024-04-09T23:28:38.969" v="320" actId="478"/>
-          <ac:spMkLst>
-            <pc:docMk/>
-            <pc:sldMk cId="1361684937" sldId="279"/>
-            <ac:spMk id="2" creationId="{2E0BE8E3-9C05-A28B-75F3-3EC7F3CD1016}"/>
-          </ac:spMkLst>
-        </pc:spChg>
-        <pc:spChg chg="mod">
-          <ac:chgData name="Caio Eduardo Ireno" userId="1862f81e13df3e98" providerId="LiveId" clId="{32C3D5D9-CEE4-47B4-98AC-81279FDF8C9F}" dt="2024-04-09T23:28:22.214" v="319" actId="207"/>
-          <ac:spMkLst>
-            <pc:docMk/>
-            <pc:sldMk cId="1361684937" sldId="279"/>
-            <ac:spMk id="3" creationId="{7C512AA0-AF02-AF33-485E-872335E29C63}"/>
-          </ac:spMkLst>
-        </pc:spChg>
-        <pc:spChg chg="add mod">
-          <ac:chgData name="Caio Eduardo Ireno" userId="1862f81e13df3e98" providerId="LiveId" clId="{32C3D5D9-CEE4-47B4-98AC-81279FDF8C9F}" dt="2024-04-09T23:28:39.427" v="321"/>
-          <ac:spMkLst>
-            <pc:docMk/>
-            <pc:sldMk cId="1361684937" sldId="279"/>
-            <ac:spMk id="5" creationId="{49106578-F58E-35DA-4B15-274E044B27B7}"/>
-          </ac:spMkLst>
-        </pc:spChg>
       </pc:sldChg>
       <pc:sldChg chg="del">
         <pc:chgData name="Caio Eduardo Ireno" userId="1862f81e13df3e98" providerId="LiveId" clId="{32C3D5D9-CEE4-47B4-98AC-81279FDF8C9F}" dt="2024-04-09T22:05:16.900" v="27" actId="47"/>
@@ -538,22 +315,6 @@
           <pc:docMk/>
           <pc:sldMk cId="3509862861" sldId="280"/>
         </pc:sldMkLst>
-        <pc:spChg chg="mod">
-          <ac:chgData name="Caio Eduardo Ireno" userId="1862f81e13df3e98" providerId="LiveId" clId="{32C3D5D9-CEE4-47B4-98AC-81279FDF8C9F}" dt="2024-04-09T23:31:03.702" v="351" actId="1076"/>
-          <ac:spMkLst>
-            <pc:docMk/>
-            <pc:sldMk cId="3509862861" sldId="280"/>
-            <ac:spMk id="2" creationId="{36E12094-42DD-4F8F-1166-40334D19CA46}"/>
-          </ac:spMkLst>
-        </pc:spChg>
-        <pc:spChg chg="mod">
-          <ac:chgData name="Caio Eduardo Ireno" userId="1862f81e13df3e98" providerId="LiveId" clId="{32C3D5D9-CEE4-47B4-98AC-81279FDF8C9F}" dt="2024-04-09T23:30:10.403" v="337" actId="123"/>
-          <ac:spMkLst>
-            <pc:docMk/>
-            <pc:sldMk cId="3509862861" sldId="280"/>
-            <ac:spMk id="3" creationId="{E495A524-9280-FD5B-A4CE-F204C7DF71F5}"/>
-          </ac:spMkLst>
-        </pc:spChg>
       </pc:sldChg>
       <pc:sldChg chg="addSp delSp modSp add mod">
         <pc:chgData name="Caio Eduardo Ireno" userId="1862f81e13df3e98" providerId="LiveId" clId="{32C3D5D9-CEE4-47B4-98AC-81279FDF8C9F}" dt="2024-04-09T23:31:11.862" v="356"/>
@@ -561,62 +322,6 @@
           <pc:docMk/>
           <pc:sldMk cId="3224971599" sldId="281"/>
         </pc:sldMkLst>
-        <pc:spChg chg="del">
-          <ac:chgData name="Caio Eduardo Ireno" userId="1862f81e13df3e98" providerId="LiveId" clId="{32C3D5D9-CEE4-47B4-98AC-81279FDF8C9F}" dt="2024-04-09T23:31:07.285" v="352" actId="478"/>
-          <ac:spMkLst>
-            <pc:docMk/>
-            <pc:sldMk cId="3224971599" sldId="281"/>
-            <ac:spMk id="2" creationId="{36E12094-42DD-4F8F-1166-40334D19CA46}"/>
-          </ac:spMkLst>
-        </pc:spChg>
-        <pc:spChg chg="add del mod">
-          <ac:chgData name="Caio Eduardo Ireno" userId="1862f81e13df3e98" providerId="LiveId" clId="{32C3D5D9-CEE4-47B4-98AC-81279FDF8C9F}" dt="2024-04-09T23:30:46.476" v="347" actId="20577"/>
-          <ac:spMkLst>
-            <pc:docMk/>
-            <pc:sldMk cId="3224971599" sldId="281"/>
-            <ac:spMk id="3" creationId="{E495A524-9280-FD5B-A4CE-F204C7DF71F5}"/>
-          </ac:spMkLst>
-        </pc:spChg>
-        <pc:spChg chg="add">
-          <ac:chgData name="Caio Eduardo Ireno" userId="1862f81e13df3e98" providerId="LiveId" clId="{32C3D5D9-CEE4-47B4-98AC-81279FDF8C9F}" dt="2024-04-09T23:30:36.969" v="340"/>
-          <ac:spMkLst>
-            <pc:docMk/>
-            <pc:sldMk cId="3224971599" sldId="281"/>
-            <ac:spMk id="5" creationId="{F1279237-C874-5663-D749-EC669B01928F}"/>
-          </ac:spMkLst>
-        </pc:spChg>
-        <pc:spChg chg="add mod">
-          <ac:chgData name="Caio Eduardo Ireno" userId="1862f81e13df3e98" providerId="LiveId" clId="{32C3D5D9-CEE4-47B4-98AC-81279FDF8C9F}" dt="2024-04-09T23:30:42.511" v="343"/>
-          <ac:spMkLst>
-            <pc:docMk/>
-            <pc:sldMk cId="3224971599" sldId="281"/>
-            <ac:spMk id="6" creationId="{93618F3B-4064-1A8D-8AF9-79BA98D91D2D}"/>
-          </ac:spMkLst>
-        </pc:spChg>
-        <pc:spChg chg="add del mod">
-          <ac:chgData name="Caio Eduardo Ireno" userId="1862f81e13df3e98" providerId="LiveId" clId="{32C3D5D9-CEE4-47B4-98AC-81279FDF8C9F}" dt="2024-04-09T23:31:11.523" v="355" actId="478"/>
-          <ac:spMkLst>
-            <pc:docMk/>
-            <pc:sldMk cId="3224971599" sldId="281"/>
-            <ac:spMk id="8" creationId="{49E20978-6D65-C3E4-2597-411D4DB9FB59}"/>
-          </ac:spMkLst>
-        </pc:spChg>
-        <pc:spChg chg="add mod">
-          <ac:chgData name="Caio Eduardo Ireno" userId="1862f81e13df3e98" providerId="LiveId" clId="{32C3D5D9-CEE4-47B4-98AC-81279FDF8C9F}" dt="2024-04-09T23:31:10.066" v="354"/>
-          <ac:spMkLst>
-            <pc:docMk/>
-            <pc:sldMk cId="3224971599" sldId="281"/>
-            <ac:spMk id="9" creationId="{E6BE179D-03EE-1F0F-5B5E-2D3D2F9E3D7E}"/>
-          </ac:spMkLst>
-        </pc:spChg>
-        <pc:spChg chg="add mod">
-          <ac:chgData name="Caio Eduardo Ireno" userId="1862f81e13df3e98" providerId="LiveId" clId="{32C3D5D9-CEE4-47B4-98AC-81279FDF8C9F}" dt="2024-04-09T23:31:11.862" v="356"/>
-          <ac:spMkLst>
-            <pc:docMk/>
-            <pc:sldMk cId="3224971599" sldId="281"/>
-            <ac:spMk id="10" creationId="{EB19D9EE-201A-BABA-A69C-D93B14540B10}"/>
-          </ac:spMkLst>
-        </pc:spChg>
       </pc:sldChg>
       <pc:sldChg chg="del">
         <pc:chgData name="Caio Eduardo Ireno" userId="1862f81e13df3e98" providerId="LiveId" clId="{32C3D5D9-CEE4-47B4-98AC-81279FDF8C9F}" dt="2024-04-09T22:05:18.385" v="30" actId="47"/>
@@ -631,38 +336,6 @@
           <pc:docMk/>
           <pc:sldMk cId="715125093" sldId="282"/>
         </pc:sldMkLst>
-        <pc:spChg chg="del">
-          <ac:chgData name="Caio Eduardo Ireno" userId="1862f81e13df3e98" providerId="LiveId" clId="{32C3D5D9-CEE4-47B4-98AC-81279FDF8C9F}" dt="2024-04-09T23:31:14.878" v="357" actId="478"/>
-          <ac:spMkLst>
-            <pc:docMk/>
-            <pc:sldMk cId="715125093" sldId="282"/>
-            <ac:spMk id="2" creationId="{36E12094-42DD-4F8F-1166-40334D19CA46}"/>
-          </ac:spMkLst>
-        </pc:spChg>
-        <pc:spChg chg="mod">
-          <ac:chgData name="Caio Eduardo Ireno" userId="1862f81e13df3e98" providerId="LiveId" clId="{32C3D5D9-CEE4-47B4-98AC-81279FDF8C9F}" dt="2024-04-09T23:31:44.015" v="368" actId="20577"/>
-          <ac:spMkLst>
-            <pc:docMk/>
-            <pc:sldMk cId="715125093" sldId="282"/>
-            <ac:spMk id="3" creationId="{E495A524-9280-FD5B-A4CE-F204C7DF71F5}"/>
-          </ac:spMkLst>
-        </pc:spChg>
-        <pc:spChg chg="add del mod">
-          <ac:chgData name="Caio Eduardo Ireno" userId="1862f81e13df3e98" providerId="LiveId" clId="{32C3D5D9-CEE4-47B4-98AC-81279FDF8C9F}" dt="2024-04-09T23:31:15.477" v="358" actId="478"/>
-          <ac:spMkLst>
-            <pc:docMk/>
-            <pc:sldMk cId="715125093" sldId="282"/>
-            <ac:spMk id="6" creationId="{686906BA-2D27-EB7A-B813-0FBA18822E43}"/>
-          </ac:spMkLst>
-        </pc:spChg>
-        <pc:spChg chg="add mod">
-          <ac:chgData name="Caio Eduardo Ireno" userId="1862f81e13df3e98" providerId="LiveId" clId="{32C3D5D9-CEE4-47B4-98AC-81279FDF8C9F}" dt="2024-04-09T23:31:16.391" v="359"/>
-          <ac:spMkLst>
-            <pc:docMk/>
-            <pc:sldMk cId="715125093" sldId="282"/>
-            <ac:spMk id="7" creationId="{3A68CBF7-5CB1-1945-0AC3-D1235FA0F55F}"/>
-          </ac:spMkLst>
-        </pc:spChg>
       </pc:sldChg>
       <pc:sldChg chg="del">
         <pc:chgData name="Caio Eduardo Ireno" userId="1862f81e13df3e98" providerId="LiveId" clId="{32C3D5D9-CEE4-47B4-98AC-81279FDF8C9F}" dt="2024-04-09T22:05:18.030" v="29" actId="47"/>
@@ -684,30 +357,6 @@
           <pc:docMk/>
           <pc:sldMk cId="3781581471" sldId="283"/>
         </pc:sldMkLst>
-        <pc:spChg chg="mod">
-          <ac:chgData name="Caio Eduardo Ireno" userId="1862f81e13df3e98" providerId="LiveId" clId="{32C3D5D9-CEE4-47B4-98AC-81279FDF8C9F}" dt="2024-04-09T23:32:20.481" v="377" actId="1076"/>
-          <ac:spMkLst>
-            <pc:docMk/>
-            <pc:sldMk cId="3781581471" sldId="283"/>
-            <ac:spMk id="2" creationId="{C91D36CC-D8B4-261D-F76D-20D452AE5808}"/>
-          </ac:spMkLst>
-        </pc:spChg>
-        <pc:spChg chg="del">
-          <ac:chgData name="Caio Eduardo Ireno" userId="1862f81e13df3e98" providerId="LiveId" clId="{32C3D5D9-CEE4-47B4-98AC-81279FDF8C9F}" dt="2024-04-09T23:32:09.285" v="370" actId="478"/>
-          <ac:spMkLst>
-            <pc:docMk/>
-            <pc:sldMk cId="3781581471" sldId="283"/>
-            <ac:spMk id="3" creationId="{B4B19148-27BD-921F-8FC1-178F2D340CEA}"/>
-          </ac:spMkLst>
-        </pc:spChg>
-        <pc:picChg chg="add mod">
-          <ac:chgData name="Caio Eduardo Ireno" userId="1862f81e13df3e98" providerId="LiveId" clId="{32C3D5D9-CEE4-47B4-98AC-81279FDF8C9F}" dt="2024-04-09T23:32:14.897" v="373" actId="1076"/>
-          <ac:picMkLst>
-            <pc:docMk/>
-            <pc:sldMk cId="3781581471" sldId="283"/>
-            <ac:picMk id="2050" creationId="{6D596427-9E01-5115-F7C8-FD3D9FAF3CE7}"/>
-          </ac:picMkLst>
-        </pc:picChg>
       </pc:sldChg>
     </pc:docChg>
   </pc:docChgLst>
@@ -9322,7 +8971,7 @@
           <a:p>
             <a:fld id="{7A9A650A-8BD1-4FDE-9899-1C20DF4B7708}" type="datetimeFigureOut">
               <a:rPr lang="en-US" smtClean="0"/>
-              <a:t>5/22/25</a:t>
+              <a:t>5/30/2025</a:t>
             </a:fld>
             <a:endParaRPr lang="en-US" dirty="0"/>
           </a:p>
@@ -9687,7 +9336,7 @@
           <a:p>
             <a:fld id="{DC107E61-D2F8-452B-B53A-91FE1E439E24}" type="datetimeFigureOut">
               <a:rPr lang="en-US" smtClean="0"/>
-              <a:t>5/22/25</a:t>
+              <a:t>5/30/2025</a:t>
             </a:fld>
             <a:endParaRPr lang="en-US" dirty="0"/>
           </a:p>
@@ -10258,7 +9907,7 @@
           <a:p>
             <a:fld id="{A7543A57-F65A-4C42-9156-7629C10666E9}" type="datetimeFigureOut">
               <a:rPr lang="en-US" smtClean="0"/>
-              <a:t>5/22/25</a:t>
+              <a:t>5/30/2025</a:t>
             </a:fld>
             <a:endParaRPr lang="en-US" dirty="0"/>
           </a:p>
@@ -10683,7 +10332,7 @@
           <a:p>
             <a:fld id="{969FBF0B-319E-4F95-BA43-902EB3DC9783}" type="datetimeFigureOut">
               <a:rPr lang="en-US" smtClean="0"/>
-              <a:t>5/22/25</a:t>
+              <a:t>5/30/2025</a:t>
             </a:fld>
             <a:endParaRPr lang="en-US" dirty="0"/>
           </a:p>
@@ -10802,7 +10451,7 @@
           <a:p>
             <a:fld id="{081158B3-6703-4BBB-A09E-33FD65E7DB24}" type="datetimeFigureOut">
               <a:rPr lang="en-US" smtClean="0"/>
-              <a:t>5/22/25</a:t>
+              <a:t>5/30/2025</a:t>
             </a:fld>
             <a:endParaRPr lang="en-US" dirty="0"/>
           </a:p>
@@ -10898,7 +10547,7 @@
           <a:p>
             <a:fld id="{AFFE9955-2DD3-491E-92B6-7018343227CE}" type="datetimeFigureOut">
               <a:rPr lang="en-US" smtClean="0"/>
-              <a:t>5/22/25</a:t>
+              <a:t>5/30/2025</a:t>
             </a:fld>
             <a:endParaRPr lang="en-US" dirty="0"/>
           </a:p>
@@ -11189,7 +10838,7 @@
           <a:p>
             <a:fld id="{19888A28-1D79-4F41-9521-CF26BB2C7EE3}" type="datetimeFigureOut">
               <a:rPr lang="en-US" smtClean="0"/>
-              <a:t>5/22/25</a:t>
+              <a:t>5/30/2025</a:t>
             </a:fld>
             <a:endParaRPr lang="en-US" dirty="0"/>
           </a:p>
@@ -11462,7 +11111,7 @@
           <a:p>
             <a:fld id="{43BD9950-AF07-4F2A-A949-E1C816A93B30}" type="datetimeFigureOut">
               <a:rPr lang="en-US" smtClean="0"/>
-              <a:t>5/22/25</a:t>
+              <a:t>5/30/2025</a:t>
             </a:fld>
             <a:endParaRPr lang="en-US" dirty="0"/>
           </a:p>
@@ -11633,7 +11282,7 @@
           <a:p>
             <a:fld id="{4DA3262D-6073-4A30-973C-53BE1D29884A}" type="datetimeFigureOut">
               <a:rPr lang="en-US" smtClean="0"/>
-              <a:t>5/22/25</a:t>
+              <a:t>5/30/2025</a:t>
             </a:fld>
             <a:endParaRPr lang="en-US" dirty="0"/>
           </a:p>
@@ -11814,7 +11463,7 @@
           <a:p>
             <a:fld id="{C00AB0AF-EEE9-4421-9298-EB11A547E63F}" type="datetimeFigureOut">
               <a:rPr lang="en-US" smtClean="0"/>
-              <a:t>5/22/25</a:t>
+              <a:t>5/30/2025</a:t>
             </a:fld>
             <a:endParaRPr lang="en-US" dirty="0"/>
           </a:p>
@@ -14616,7 +14265,7 @@
           <a:p>
             <a:fld id="{34A43A2E-6632-4F9D-8728-2CF59ACBBE60}" type="datetimeFigureOut">
               <a:rPr lang="en-US" dirty="0"/>
-              <a:t>5/22/25</a:t>
+              <a:t>5/30/2025</a:t>
             </a:fld>
             <a:endParaRPr lang="en-US" dirty="0"/>
           </a:p>
